--- a/Suicide_AI_Project_Presentation.pptx
+++ b/Suicide_AI_Project_Presentation.pptx
@@ -5,18 +5,17 @@
     <p:sldMasterId id="2147483648" r:id="rId1"/>
   </p:sldMasterIdLst>
   <p:sldIdLst>
-    <p:sldId id="256" r:id="rId7"/>
-    <p:sldId id="257" r:id="rId8"/>
-    <p:sldId id="258" r:id="rId9"/>
-    <p:sldId id="259" r:id="rId10"/>
-    <p:sldId id="260" r:id="rId11"/>
-    <p:sldId id="261" r:id="rId12"/>
-    <p:sldId id="262" r:id="rId13"/>
-    <p:sldId id="263" r:id="rId14"/>
-    <p:sldId id="264" r:id="rId15"/>
-    <p:sldId id="265" r:id="rId16"/>
-    <p:sldId id="266" r:id="rId17"/>
-    <p:sldId id="267" r:id="rId18"/>
+    <p:sldId id="256" r:id="rId2"/>
+    <p:sldId id="257" r:id="rId3"/>
+    <p:sldId id="258" r:id="rId4"/>
+    <p:sldId id="259" r:id="rId5"/>
+    <p:sldId id="260" r:id="rId6"/>
+    <p:sldId id="261" r:id="rId7"/>
+    <p:sldId id="262" r:id="rId8"/>
+    <p:sldId id="263" r:id="rId9"/>
+    <p:sldId id="264" r:id="rId10"/>
+    <p:sldId id="265" r:id="rId11"/>
+    <p:sldId id="266" r:id="rId12"/>
   </p:sldIdLst>
   <p:sldSz cx="9144000" cy="6858000" type="screen4x3"/>
   <p:notesSz cx="6858000" cy="9144000"/>
@@ -115,6 +114,22 @@
       </a:defRPr>
     </a:lvl9pPr>
   </p:defaultTextStyle>
+  <p:extLst>
+    <p:ext uri="{EFAFB233-063F-42B5-8137-9DF3F51BA10A}">
+      <p15:sldGuideLst xmlns:p15="http://schemas.microsoft.com/office/powerpoint/2012/main">
+        <p15:guide id="1" orient="horz" pos="2160">
+          <p15:clr>
+            <a:srgbClr val="A4A3A4"/>
+          </p15:clr>
+        </p15:guide>
+        <p15:guide id="2" pos="2880">
+          <p15:clr>
+            <a:srgbClr val="A4A3A4"/>
+          </p15:clr>
+        </p15:guide>
+      </p15:sldGuideLst>
+    </p:ext>
+  </p:extLst>
 </p:presentation>
 </file>
 
@@ -156,10 +171,9 @@
           <a:lstStyle/>
           <a:p>
             <a:r>
-              <a:rPr lang="en-US" smtClean="0"/>
+              <a:rPr lang="en-US"/>
               <a:t>Click to edit Master title style</a:t>
             </a:r>
-            <a:endParaRPr lang="en-US"/>
           </a:p>
         </p:txBody>
       </p:sp>
@@ -275,10 +289,9 @@
           </a:lstStyle>
           <a:p>
             <a:r>
-              <a:rPr lang="en-US" smtClean="0"/>
+              <a:rPr lang="en-US"/>
               <a:t>Click to edit Master subtitle style</a:t>
             </a:r>
-            <a:endParaRPr lang="en-US"/>
           </a:p>
         </p:txBody>
       </p:sp>
@@ -299,7 +312,7 @@
           <a:p>
             <a:fld id="{5BCAD085-E8A6-8845-BD4E-CB4CCA059FC4}" type="datetimeFigureOut">
               <a:rPr lang="en-US" smtClean="0"/>
-              <a:t>1/27/13</a:t>
+              <a:t>4/3/2026</a:t>
             </a:fld>
             <a:endParaRPr lang="en-US"/>
           </a:p>
@@ -393,10 +406,9 @@
           <a:lstStyle/>
           <a:p>
             <a:r>
-              <a:rPr lang="en-US" smtClean="0"/>
+              <a:rPr lang="en-US"/>
               <a:t>Click to edit Master title style</a:t>
             </a:r>
-            <a:endParaRPr lang="en-US"/>
           </a:p>
         </p:txBody>
       </p:sp>
@@ -417,38 +429,37 @@
           <a:p>
             <a:pPr lvl="0"/>
             <a:r>
-              <a:rPr lang="en-US" smtClean="0"/>
+              <a:rPr lang="en-US"/>
               <a:t>Click to edit Master text styles</a:t>
             </a:r>
           </a:p>
           <a:p>
             <a:pPr lvl="1"/>
             <a:r>
-              <a:rPr lang="en-US" smtClean="0"/>
+              <a:rPr lang="en-US"/>
               <a:t>Second level</a:t>
             </a:r>
           </a:p>
           <a:p>
             <a:pPr lvl="2"/>
             <a:r>
-              <a:rPr lang="en-US" smtClean="0"/>
+              <a:rPr lang="en-US"/>
               <a:t>Third level</a:t>
             </a:r>
           </a:p>
           <a:p>
             <a:pPr lvl="3"/>
             <a:r>
-              <a:rPr lang="en-US" smtClean="0"/>
+              <a:rPr lang="en-US"/>
               <a:t>Fourth level</a:t>
             </a:r>
           </a:p>
           <a:p>
             <a:pPr lvl="4"/>
             <a:r>
-              <a:rPr lang="en-US" smtClean="0"/>
+              <a:rPr lang="en-US"/>
               <a:t>Fifth level</a:t>
             </a:r>
-            <a:endParaRPr lang="en-US"/>
           </a:p>
         </p:txBody>
       </p:sp>
@@ -469,7 +480,7 @@
           <a:p>
             <a:fld id="{5BCAD085-E8A6-8845-BD4E-CB4CCA059FC4}" type="datetimeFigureOut">
               <a:rPr lang="en-US" smtClean="0"/>
-              <a:t>1/27/13</a:t>
+              <a:t>4/3/2026</a:t>
             </a:fld>
             <a:endParaRPr lang="en-US"/>
           </a:p>
@@ -568,10 +579,9 @@
           <a:lstStyle/>
           <a:p>
             <a:r>
-              <a:rPr lang="en-US" smtClean="0"/>
+              <a:rPr lang="en-US"/>
               <a:t>Click to edit Master title style</a:t>
             </a:r>
-            <a:endParaRPr lang="en-US"/>
           </a:p>
         </p:txBody>
       </p:sp>
@@ -597,38 +607,37 @@
           <a:p>
             <a:pPr lvl="0"/>
             <a:r>
-              <a:rPr lang="en-US" smtClean="0"/>
+              <a:rPr lang="en-US"/>
               <a:t>Click to edit Master text styles</a:t>
             </a:r>
           </a:p>
           <a:p>
             <a:pPr lvl="1"/>
             <a:r>
-              <a:rPr lang="en-US" smtClean="0"/>
+              <a:rPr lang="en-US"/>
               <a:t>Second level</a:t>
             </a:r>
           </a:p>
           <a:p>
             <a:pPr lvl="2"/>
             <a:r>
-              <a:rPr lang="en-US" smtClean="0"/>
+              <a:rPr lang="en-US"/>
               <a:t>Third level</a:t>
             </a:r>
           </a:p>
           <a:p>
             <a:pPr lvl="3"/>
             <a:r>
-              <a:rPr lang="en-US" smtClean="0"/>
+              <a:rPr lang="en-US"/>
               <a:t>Fourth level</a:t>
             </a:r>
           </a:p>
           <a:p>
             <a:pPr lvl="4"/>
             <a:r>
-              <a:rPr lang="en-US" smtClean="0"/>
+              <a:rPr lang="en-US"/>
               <a:t>Fifth level</a:t>
             </a:r>
-            <a:endParaRPr lang="en-US"/>
           </a:p>
         </p:txBody>
       </p:sp>
@@ -649,7 +658,7 @@
           <a:p>
             <a:fld id="{5BCAD085-E8A6-8845-BD4E-CB4CCA059FC4}" type="datetimeFigureOut">
               <a:rPr lang="en-US" smtClean="0"/>
-              <a:t>1/27/13</a:t>
+              <a:t>4/3/2026</a:t>
             </a:fld>
             <a:endParaRPr lang="en-US"/>
           </a:p>
@@ -743,10 +752,9 @@
           <a:lstStyle/>
           <a:p>
             <a:r>
-              <a:rPr lang="en-US" smtClean="0"/>
+              <a:rPr lang="en-US"/>
               <a:t>Click to edit Master title style</a:t>
             </a:r>
-            <a:endParaRPr lang="en-US"/>
           </a:p>
         </p:txBody>
       </p:sp>
@@ -767,38 +775,37 @@
           <a:p>
             <a:pPr lvl="0"/>
             <a:r>
-              <a:rPr lang="en-US" smtClean="0"/>
+              <a:rPr lang="en-US"/>
               <a:t>Click to edit Master text styles</a:t>
             </a:r>
           </a:p>
           <a:p>
             <a:pPr lvl="1"/>
             <a:r>
-              <a:rPr lang="en-US" smtClean="0"/>
+              <a:rPr lang="en-US"/>
               <a:t>Second level</a:t>
             </a:r>
           </a:p>
           <a:p>
             <a:pPr lvl="2"/>
             <a:r>
-              <a:rPr lang="en-US" smtClean="0"/>
+              <a:rPr lang="en-US"/>
               <a:t>Third level</a:t>
             </a:r>
           </a:p>
           <a:p>
             <a:pPr lvl="3"/>
             <a:r>
-              <a:rPr lang="en-US" smtClean="0"/>
+              <a:rPr lang="en-US"/>
               <a:t>Fourth level</a:t>
             </a:r>
           </a:p>
           <a:p>
             <a:pPr lvl="4"/>
             <a:r>
-              <a:rPr lang="en-US" smtClean="0"/>
+              <a:rPr lang="en-US"/>
               <a:t>Fifth level</a:t>
             </a:r>
-            <a:endParaRPr lang="en-US"/>
           </a:p>
         </p:txBody>
       </p:sp>
@@ -819,7 +826,7 @@
           <a:p>
             <a:fld id="{5BCAD085-E8A6-8845-BD4E-CB4CCA059FC4}" type="datetimeFigureOut">
               <a:rPr lang="en-US" smtClean="0"/>
-              <a:t>1/27/13</a:t>
+              <a:t>4/3/2026</a:t>
             </a:fld>
             <a:endParaRPr lang="en-US"/>
           </a:p>
@@ -922,10 +929,9 @@
           </a:lstStyle>
           <a:p>
             <a:r>
-              <a:rPr lang="en-US" smtClean="0"/>
+              <a:rPr lang="en-US"/>
               <a:t>Click to edit Master title style</a:t>
             </a:r>
-            <a:endParaRPr lang="en-US"/>
           </a:p>
         </p:txBody>
       </p:sp>
@@ -1042,7 +1048,7 @@
           <a:p>
             <a:pPr lvl="0"/>
             <a:r>
-              <a:rPr lang="en-US" smtClean="0"/>
+              <a:rPr lang="en-US"/>
               <a:t>Click to edit Master text styles</a:t>
             </a:r>
           </a:p>
@@ -1065,7 +1071,7 @@
           <a:p>
             <a:fld id="{5BCAD085-E8A6-8845-BD4E-CB4CCA059FC4}" type="datetimeFigureOut">
               <a:rPr lang="en-US" smtClean="0"/>
-              <a:t>1/27/13</a:t>
+              <a:t>4/3/2026</a:t>
             </a:fld>
             <a:endParaRPr lang="en-US"/>
           </a:p>
@@ -1159,10 +1165,9 @@
           <a:lstStyle/>
           <a:p>
             <a:r>
-              <a:rPr lang="en-US" smtClean="0"/>
+              <a:rPr lang="en-US"/>
               <a:t>Click to edit Master title style</a:t>
             </a:r>
-            <a:endParaRPr lang="en-US"/>
           </a:p>
         </p:txBody>
       </p:sp>
@@ -1216,38 +1221,37 @@
           <a:p>
             <a:pPr lvl="0"/>
             <a:r>
-              <a:rPr lang="en-US" smtClean="0"/>
+              <a:rPr lang="en-US"/>
               <a:t>Click to edit Master text styles</a:t>
             </a:r>
           </a:p>
           <a:p>
             <a:pPr lvl="1"/>
             <a:r>
-              <a:rPr lang="en-US" smtClean="0"/>
+              <a:rPr lang="en-US"/>
               <a:t>Second level</a:t>
             </a:r>
           </a:p>
           <a:p>
             <a:pPr lvl="2"/>
             <a:r>
-              <a:rPr lang="en-US" smtClean="0"/>
+              <a:rPr lang="en-US"/>
               <a:t>Third level</a:t>
             </a:r>
           </a:p>
           <a:p>
             <a:pPr lvl="3"/>
             <a:r>
-              <a:rPr lang="en-US" smtClean="0"/>
+              <a:rPr lang="en-US"/>
               <a:t>Fourth level</a:t>
             </a:r>
           </a:p>
           <a:p>
             <a:pPr lvl="4"/>
             <a:r>
-              <a:rPr lang="en-US" smtClean="0"/>
+              <a:rPr lang="en-US"/>
               <a:t>Fifth level</a:t>
             </a:r>
-            <a:endParaRPr lang="en-US"/>
           </a:p>
         </p:txBody>
       </p:sp>
@@ -1301,38 +1305,37 @@
           <a:p>
             <a:pPr lvl="0"/>
             <a:r>
-              <a:rPr lang="en-US" smtClean="0"/>
+              <a:rPr lang="en-US"/>
               <a:t>Click to edit Master text styles</a:t>
             </a:r>
           </a:p>
           <a:p>
             <a:pPr lvl="1"/>
             <a:r>
-              <a:rPr lang="en-US" smtClean="0"/>
+              <a:rPr lang="en-US"/>
               <a:t>Second level</a:t>
             </a:r>
           </a:p>
           <a:p>
             <a:pPr lvl="2"/>
             <a:r>
-              <a:rPr lang="en-US" smtClean="0"/>
+              <a:rPr lang="en-US"/>
               <a:t>Third level</a:t>
             </a:r>
           </a:p>
           <a:p>
             <a:pPr lvl="3"/>
             <a:r>
-              <a:rPr lang="en-US" smtClean="0"/>
+              <a:rPr lang="en-US"/>
               <a:t>Fourth level</a:t>
             </a:r>
           </a:p>
           <a:p>
             <a:pPr lvl="4"/>
             <a:r>
-              <a:rPr lang="en-US" smtClean="0"/>
+              <a:rPr lang="en-US"/>
               <a:t>Fifth level</a:t>
             </a:r>
-            <a:endParaRPr lang="en-US"/>
           </a:p>
         </p:txBody>
       </p:sp>
@@ -1353,7 +1356,7 @@
           <a:p>
             <a:fld id="{5BCAD085-E8A6-8845-BD4E-CB4CCA059FC4}" type="datetimeFigureOut">
               <a:rPr lang="en-US" smtClean="0"/>
-              <a:t>1/27/13</a:t>
+              <a:t>4/3/2026</a:t>
             </a:fld>
             <a:endParaRPr lang="en-US"/>
           </a:p>
@@ -1451,10 +1454,9 @@
           </a:lstStyle>
           <a:p>
             <a:r>
-              <a:rPr lang="en-US" smtClean="0"/>
+              <a:rPr lang="en-US"/>
               <a:t>Click to edit Master title style</a:t>
             </a:r>
-            <a:endParaRPr lang="en-US"/>
           </a:p>
         </p:txBody>
       </p:sp>
@@ -1517,7 +1519,7 @@
           <a:p>
             <a:pPr lvl="0"/>
             <a:r>
-              <a:rPr lang="en-US" smtClean="0"/>
+              <a:rPr lang="en-US"/>
               <a:t>Click to edit Master text styles</a:t>
             </a:r>
           </a:p>
@@ -1573,38 +1575,37 @@
           <a:p>
             <a:pPr lvl="0"/>
             <a:r>
-              <a:rPr lang="en-US" smtClean="0"/>
+              <a:rPr lang="en-US"/>
               <a:t>Click to edit Master text styles</a:t>
             </a:r>
           </a:p>
           <a:p>
             <a:pPr lvl="1"/>
             <a:r>
-              <a:rPr lang="en-US" smtClean="0"/>
+              <a:rPr lang="en-US"/>
               <a:t>Second level</a:t>
             </a:r>
           </a:p>
           <a:p>
             <a:pPr lvl="2"/>
             <a:r>
-              <a:rPr lang="en-US" smtClean="0"/>
+              <a:rPr lang="en-US"/>
               <a:t>Third level</a:t>
             </a:r>
           </a:p>
           <a:p>
             <a:pPr lvl="3"/>
             <a:r>
-              <a:rPr lang="en-US" smtClean="0"/>
+              <a:rPr lang="en-US"/>
               <a:t>Fourth level</a:t>
             </a:r>
           </a:p>
           <a:p>
             <a:pPr lvl="4"/>
             <a:r>
-              <a:rPr lang="en-US" smtClean="0"/>
+              <a:rPr lang="en-US"/>
               <a:t>Fifth level</a:t>
             </a:r>
-            <a:endParaRPr lang="en-US"/>
           </a:p>
         </p:txBody>
       </p:sp>
@@ -1667,7 +1668,7 @@
           <a:p>
             <a:pPr lvl="0"/>
             <a:r>
-              <a:rPr lang="en-US" smtClean="0"/>
+              <a:rPr lang="en-US"/>
               <a:t>Click to edit Master text styles</a:t>
             </a:r>
           </a:p>
@@ -1723,38 +1724,37 @@
           <a:p>
             <a:pPr lvl="0"/>
             <a:r>
-              <a:rPr lang="en-US" smtClean="0"/>
+              <a:rPr lang="en-US"/>
               <a:t>Click to edit Master text styles</a:t>
             </a:r>
           </a:p>
           <a:p>
             <a:pPr lvl="1"/>
             <a:r>
-              <a:rPr lang="en-US" smtClean="0"/>
+              <a:rPr lang="en-US"/>
               <a:t>Second level</a:t>
             </a:r>
           </a:p>
           <a:p>
             <a:pPr lvl="2"/>
             <a:r>
-              <a:rPr lang="en-US" smtClean="0"/>
+              <a:rPr lang="en-US"/>
               <a:t>Third level</a:t>
             </a:r>
           </a:p>
           <a:p>
             <a:pPr lvl="3"/>
             <a:r>
-              <a:rPr lang="en-US" smtClean="0"/>
+              <a:rPr lang="en-US"/>
               <a:t>Fourth level</a:t>
             </a:r>
           </a:p>
           <a:p>
             <a:pPr lvl="4"/>
             <a:r>
-              <a:rPr lang="en-US" smtClean="0"/>
+              <a:rPr lang="en-US"/>
               <a:t>Fifth level</a:t>
             </a:r>
-            <a:endParaRPr lang="en-US"/>
           </a:p>
         </p:txBody>
       </p:sp>
@@ -1775,7 +1775,7 @@
           <a:p>
             <a:fld id="{5BCAD085-E8A6-8845-BD4E-CB4CCA059FC4}" type="datetimeFigureOut">
               <a:rPr lang="en-US" smtClean="0"/>
-              <a:t>1/27/13</a:t>
+              <a:t>4/3/2026</a:t>
             </a:fld>
             <a:endParaRPr lang="en-US"/>
           </a:p>
@@ -1869,10 +1869,9 @@
           <a:lstStyle/>
           <a:p>
             <a:r>
-              <a:rPr lang="en-US" smtClean="0"/>
+              <a:rPr lang="en-US"/>
               <a:t>Click to edit Master title style</a:t>
             </a:r>
-            <a:endParaRPr lang="en-US"/>
           </a:p>
         </p:txBody>
       </p:sp>
@@ -1893,7 +1892,7 @@
           <a:p>
             <a:fld id="{5BCAD085-E8A6-8845-BD4E-CB4CCA059FC4}" type="datetimeFigureOut">
               <a:rPr lang="en-US" smtClean="0"/>
-              <a:t>1/27/13</a:t>
+              <a:t>4/3/2026</a:t>
             </a:fld>
             <a:endParaRPr lang="en-US"/>
           </a:p>
@@ -1988,7 +1987,7 @@
           <a:p>
             <a:fld id="{5BCAD085-E8A6-8845-BD4E-CB4CCA059FC4}" type="datetimeFigureOut">
               <a:rPr lang="en-US" smtClean="0"/>
-              <a:t>1/27/13</a:t>
+              <a:t>4/3/2026</a:t>
             </a:fld>
             <a:endParaRPr lang="en-US"/>
           </a:p>
@@ -2091,10 +2090,9 @@
           </a:lstStyle>
           <a:p>
             <a:r>
-              <a:rPr lang="en-US" smtClean="0"/>
+              <a:rPr lang="en-US"/>
               <a:t>Click to edit Master title style</a:t>
             </a:r>
-            <a:endParaRPr lang="en-US"/>
           </a:p>
         </p:txBody>
       </p:sp>
@@ -2148,38 +2146,37 @@
           <a:p>
             <a:pPr lvl="0"/>
             <a:r>
-              <a:rPr lang="en-US" smtClean="0"/>
+              <a:rPr lang="en-US"/>
               <a:t>Click to edit Master text styles</a:t>
             </a:r>
           </a:p>
           <a:p>
             <a:pPr lvl="1"/>
             <a:r>
-              <a:rPr lang="en-US" smtClean="0"/>
+              <a:rPr lang="en-US"/>
               <a:t>Second level</a:t>
             </a:r>
           </a:p>
           <a:p>
             <a:pPr lvl="2"/>
             <a:r>
-              <a:rPr lang="en-US" smtClean="0"/>
+              <a:rPr lang="en-US"/>
               <a:t>Third level</a:t>
             </a:r>
           </a:p>
           <a:p>
             <a:pPr lvl="3"/>
             <a:r>
-              <a:rPr lang="en-US" smtClean="0"/>
+              <a:rPr lang="en-US"/>
               <a:t>Fourth level</a:t>
             </a:r>
           </a:p>
           <a:p>
             <a:pPr lvl="4"/>
             <a:r>
-              <a:rPr lang="en-US" smtClean="0"/>
+              <a:rPr lang="en-US"/>
               <a:t>Fifth level</a:t>
             </a:r>
-            <a:endParaRPr lang="en-US"/>
           </a:p>
         </p:txBody>
       </p:sp>
@@ -2242,7 +2239,7 @@
           <a:p>
             <a:pPr lvl="0"/>
             <a:r>
-              <a:rPr lang="en-US" smtClean="0"/>
+              <a:rPr lang="en-US"/>
               <a:t>Click to edit Master text styles</a:t>
             </a:r>
           </a:p>
@@ -2265,7 +2262,7 @@
           <a:p>
             <a:fld id="{5BCAD085-E8A6-8845-BD4E-CB4CCA059FC4}" type="datetimeFigureOut">
               <a:rPr lang="en-US" smtClean="0"/>
-              <a:t>1/27/13</a:t>
+              <a:t>4/3/2026</a:t>
             </a:fld>
             <a:endParaRPr lang="en-US"/>
           </a:p>
@@ -2368,10 +2365,9 @@
           </a:lstStyle>
           <a:p>
             <a:r>
-              <a:rPr lang="en-US" smtClean="0"/>
+              <a:rPr lang="en-US"/>
               <a:t>Click to edit Master title style</a:t>
             </a:r>
-            <a:endParaRPr lang="en-US"/>
           </a:p>
         </p:txBody>
       </p:sp>
@@ -2495,7 +2491,7 @@
           <a:p>
             <a:pPr lvl="0"/>
             <a:r>
-              <a:rPr lang="en-US" smtClean="0"/>
+              <a:rPr lang="en-US"/>
               <a:t>Click to edit Master text styles</a:t>
             </a:r>
           </a:p>
@@ -2518,7 +2514,7 @@
           <a:p>
             <a:fld id="{5BCAD085-E8A6-8845-BD4E-CB4CCA059FC4}" type="datetimeFigureOut">
               <a:rPr lang="en-US" smtClean="0"/>
-              <a:t>1/27/13</a:t>
+              <a:t>4/3/2026</a:t>
             </a:fld>
             <a:endParaRPr lang="en-US"/>
           </a:p>
@@ -2627,10 +2623,9 @@
           <a:lstStyle/>
           <a:p>
             <a:r>
-              <a:rPr lang="en-US" smtClean="0"/>
+              <a:rPr lang="en-US"/>
               <a:t>Click to edit Master title style</a:t>
             </a:r>
-            <a:endParaRPr lang="en-US"/>
           </a:p>
         </p:txBody>
       </p:sp>
@@ -2661,38 +2656,37 @@
           <a:p>
             <a:pPr lvl="0"/>
             <a:r>
-              <a:rPr lang="en-US" smtClean="0"/>
+              <a:rPr lang="en-US"/>
               <a:t>Click to edit Master text styles</a:t>
             </a:r>
           </a:p>
           <a:p>
             <a:pPr lvl="1"/>
             <a:r>
-              <a:rPr lang="en-US" smtClean="0"/>
+              <a:rPr lang="en-US"/>
               <a:t>Second level</a:t>
             </a:r>
           </a:p>
           <a:p>
             <a:pPr lvl="2"/>
             <a:r>
-              <a:rPr lang="en-US" smtClean="0"/>
+              <a:rPr lang="en-US"/>
               <a:t>Third level</a:t>
             </a:r>
           </a:p>
           <a:p>
             <a:pPr lvl="3"/>
             <a:r>
-              <a:rPr lang="en-US" smtClean="0"/>
+              <a:rPr lang="en-US"/>
               <a:t>Fourth level</a:t>
             </a:r>
           </a:p>
           <a:p>
             <a:pPr lvl="4"/>
             <a:r>
-              <a:rPr lang="en-US" smtClean="0"/>
+              <a:rPr lang="en-US"/>
               <a:t>Fifth level</a:t>
             </a:r>
-            <a:endParaRPr lang="en-US"/>
           </a:p>
         </p:txBody>
       </p:sp>
@@ -2731,7 +2725,7 @@
           <a:p>
             <a:fld id="{5BCAD085-E8A6-8845-BD4E-CB4CCA059FC4}" type="datetimeFigureOut">
               <a:rPr lang="en-US" smtClean="0"/>
-              <a:t>1/27/13</a:t>
+              <a:t>4/3/2026</a:t>
             </a:fld>
             <a:endParaRPr lang="en-US"/>
           </a:p>
@@ -3090,7 +3084,7 @@
 </file>
 
 <file path=ppt/slides/slide1.xml><?xml version="1.0" encoding="utf-8"?>
-<p:sld xmlns:a="http://schemas.openxmlformats.org/drawingml/2006/main" xmlns:p="http://schemas.openxmlformats.org/presentationml/2006/main" xmlns:r="http://schemas.openxmlformats.org/officeDocument/2006/relationships">
+<p:sld xmlns:a="http://schemas.openxmlformats.org/drawingml/2006/main" xmlns:r="http://schemas.openxmlformats.org/officeDocument/2006/relationships" xmlns:p="http://schemas.openxmlformats.org/presentationml/2006/main">
   <p:cSld>
     <p:spTree>
       <p:nvGrpSpPr>
@@ -3098,7 +3092,14 @@
         <p:cNvGrpSpPr/>
         <p:nvPr/>
       </p:nvGrpSpPr>
-      <p:grpSpPr/>
+      <p:grpSpPr>
+        <a:xfrm>
+          <a:off x="0" y="0"/>
+          <a:ext cx="0" cy="0"/>
+          <a:chOff x="0" y="0"/>
+          <a:chExt cx="0" cy="0"/>
+        </a:xfrm>
+      </p:grpSpPr>
       <p:sp>
         <p:nvSpPr>
           <p:cNvPr id="2" name="Title 1"/>
@@ -3136,18 +3137,42 @@
           <a:lstStyle/>
           <a:p>
             <a:r>
-              <a:t>Name: </a:t>
-            </a:r>
-          </a:p>
-          <a:p>
-            <a:r>
+              <a:rPr dirty="0"/>
+              <a:t>Name:</a:t>
+            </a:r>
+            <a:r>
+              <a:rPr lang="en-IN" dirty="0"/>
+              <a:t> </a:t>
+            </a:r>
+            <a:r>
+              <a:rPr lang="en-IN" dirty="0" err="1"/>
+              <a:t>Keerthick</a:t>
+            </a:r>
+            <a:r>
+              <a:rPr lang="en-IN" dirty="0"/>
+              <a:t> J</a:t>
+            </a:r>
+            <a:r>
+              <a:rPr dirty="0"/>
+              <a:t> </a:t>
+            </a:r>
+          </a:p>
+          <a:p>
+            <a:r>
+              <a:rPr dirty="0"/>
               <a:t>Course: AIML</a:t>
             </a:r>
           </a:p>
           <a:p>
             <a:r>
+              <a:rPr dirty="0"/>
               <a:t>Date:</a:t>
             </a:r>
+            <a:r>
+              <a:rPr lang="en-IN" dirty="0"/>
+              <a:t> 07-03-2026</a:t>
+            </a:r>
+            <a:endParaRPr dirty="0"/>
           </a:p>
         </p:txBody>
       </p:sp>
@@ -3160,7 +3185,7 @@
 </file>
 
 <file path=ppt/slides/slide10.xml><?xml version="1.0" encoding="utf-8"?>
-<p:sld xmlns:a="http://schemas.openxmlformats.org/drawingml/2006/main" xmlns:p="http://schemas.openxmlformats.org/presentationml/2006/main" xmlns:r="http://schemas.openxmlformats.org/officeDocument/2006/relationships">
+<p:sld xmlns:a="http://schemas.openxmlformats.org/drawingml/2006/main" xmlns:r="http://schemas.openxmlformats.org/officeDocument/2006/relationships" xmlns:p="http://schemas.openxmlformats.org/presentationml/2006/main">
   <p:cSld>
     <p:spTree>
       <p:nvGrpSpPr>
@@ -3168,7 +3193,14 @@
         <p:cNvGrpSpPr/>
         <p:nvPr/>
       </p:nvGrpSpPr>
-      <p:grpSpPr/>
+      <p:grpSpPr>
+        <a:xfrm>
+          <a:off x="0" y="0"/>
+          <a:ext cx="0" cy="0"/>
+          <a:chOff x="0" y="0"/>
+          <a:chExt cx="0" cy="0"/>
+        </a:xfrm>
+      </p:grpSpPr>
       <p:sp>
         <p:nvSpPr>
           <p:cNvPr id="2" name="Title 1"/>
@@ -3206,12 +3238,18 @@
           <a:lstStyle/>
           <a:p>
             <a:r>
-              <a:t>Used LIME/SHAP</a:t>
-            </a:r>
-          </a:p>
-          <a:p>
-            <a:r>
-              <a:t>Highlighted important words</a:t>
+              <a:rPr dirty="0"/>
+              <a:t>Used LIME</a:t>
+            </a:r>
+            <a:r>
+              <a:rPr lang="en-IN" dirty="0"/>
+              <a:t>.</a:t>
+            </a:r>
+          </a:p>
+          <a:p>
+            <a:r>
+              <a:rPr lang="en-IN" dirty="0"/>
+              <a:t>Highlighted important words.</a:t>
             </a:r>
           </a:p>
         </p:txBody>
@@ -3225,7 +3263,7 @@
 </file>
 
 <file path=ppt/slides/slide11.xml><?xml version="1.0" encoding="utf-8"?>
-<p:sld xmlns:a="http://schemas.openxmlformats.org/drawingml/2006/main" xmlns:p="http://schemas.openxmlformats.org/presentationml/2006/main" xmlns:r="http://schemas.openxmlformats.org/officeDocument/2006/relationships">
+<p:sld xmlns:a="http://schemas.openxmlformats.org/drawingml/2006/main" xmlns:r="http://schemas.openxmlformats.org/officeDocument/2006/relationships" xmlns:p="http://schemas.openxmlformats.org/presentationml/2006/main">
   <p:cSld>
     <p:spTree>
       <p:nvGrpSpPr>
@@ -3233,7 +3271,14 @@
         <p:cNvGrpSpPr/>
         <p:nvPr/>
       </p:nvGrpSpPr>
-      <p:grpSpPr/>
+      <p:grpSpPr>
+        <a:xfrm>
+          <a:off x="0" y="0"/>
+          <a:ext cx="0" cy="0"/>
+          <a:chOff x="0" y="0"/>
+          <a:chExt cx="0" cy="0"/>
+        </a:xfrm>
+      </p:grpSpPr>
       <p:sp>
         <p:nvSpPr>
           <p:cNvPr id="2" name="Title 1"/>
@@ -3271,83 +3316,41 @@
           <a:lstStyle/>
           <a:p>
             <a:r>
+              <a:rPr dirty="0"/>
               <a:t>AI helps detect suicidal intent</a:t>
             </a:r>
-          </a:p>
-          <a:p>
-            <a:r>
-              <a:t>Transformers perform best</a:t>
-            </a:r>
-          </a:p>
-        </p:txBody>
-      </p:sp>
-    </p:spTree>
-  </p:cSld>
-  <p:clrMapOvr>
-    <a:masterClrMapping/>
-  </p:clrMapOvr>
-</p:sld>
-</file>
-
-<file path=ppt/slides/slide12.xml><?xml version="1.0" encoding="utf-8"?>
-<p:sld xmlns:a="http://schemas.openxmlformats.org/drawingml/2006/main" xmlns:p="http://schemas.openxmlformats.org/presentationml/2006/main" xmlns:r="http://schemas.openxmlformats.org/officeDocument/2006/relationships">
-  <p:cSld>
-    <p:spTree>
-      <p:nvGrpSpPr>
-        <p:cNvPr id="1" name=""/>
-        <p:cNvGrpSpPr/>
-        <p:nvPr/>
-      </p:nvGrpSpPr>
-      <p:grpSpPr/>
-      <p:sp>
-        <p:nvSpPr>
-          <p:cNvPr id="2" name="Title 1"/>
-          <p:cNvSpPr>
-            <a:spLocks noGrp="1"/>
-          </p:cNvSpPr>
-          <p:nvPr>
-            <p:ph type="title"/>
-          </p:nvPr>
-        </p:nvSpPr>
-        <p:spPr/>
-        <p:txBody>
-          <a:bodyPr/>
-          <a:lstStyle/>
-          <a:p>
-            <a:r>
-              <a:t>Future Work</a:t>
-            </a:r>
-          </a:p>
-        </p:txBody>
-      </p:sp>
-      <p:sp>
-        <p:nvSpPr>
-          <p:cNvPr id="3" name="Content Placeholder 2"/>
-          <p:cNvSpPr>
-            <a:spLocks noGrp="1"/>
-          </p:cNvSpPr>
-          <p:nvPr>
-            <p:ph idx="1"/>
-          </p:nvPr>
-        </p:nvSpPr>
-        <p:spPr/>
-        <p:txBody>
-          <a:bodyPr/>
-          <a:lstStyle/>
-          <a:p>
-            <a:r>
-              <a:t>Real-time monitoring</a:t>
-            </a:r>
-          </a:p>
-          <a:p>
-            <a:r>
-              <a:t>Multilingual support</a:t>
-            </a:r>
-          </a:p>
-          <a:p>
-            <a:r>
-              <a:t>Chatbot integration</a:t>
-            </a:r>
+            <a:r>
+              <a:rPr lang="en-IN" dirty="0"/>
+              <a:t>.</a:t>
+            </a:r>
+            <a:endParaRPr dirty="0"/>
+          </a:p>
+          <a:p>
+            <a:r>
+              <a:rPr dirty="0"/>
+              <a:t>Transformer</a:t>
+            </a:r>
+            <a:r>
+              <a:rPr lang="en-IN" dirty="0"/>
+              <a:t> BERT</a:t>
+            </a:r>
+            <a:r>
+              <a:rPr dirty="0"/>
+              <a:t> perform</a:t>
+            </a:r>
+            <a:r>
+              <a:rPr lang="en-IN" dirty="0"/>
+              <a:t>d</a:t>
+            </a:r>
+            <a:r>
+              <a:rPr dirty="0"/>
+              <a:t> best</a:t>
+            </a:r>
+            <a:r>
+              <a:rPr lang="en-IN" dirty="0"/>
+              <a:t> compared to others with the accuracy of 96%.</a:t>
+            </a:r>
+            <a:endParaRPr dirty="0"/>
           </a:p>
         </p:txBody>
       </p:sp>
@@ -3360,7 +3363,7 @@
 </file>
 
 <file path=ppt/slides/slide2.xml><?xml version="1.0" encoding="utf-8"?>
-<p:sld xmlns:a="http://schemas.openxmlformats.org/drawingml/2006/main" xmlns:p="http://schemas.openxmlformats.org/presentationml/2006/main" xmlns:r="http://schemas.openxmlformats.org/officeDocument/2006/relationships">
+<p:sld xmlns:a="http://schemas.openxmlformats.org/drawingml/2006/main" xmlns:r="http://schemas.openxmlformats.org/officeDocument/2006/relationships" xmlns:p="http://schemas.openxmlformats.org/presentationml/2006/main">
   <p:cSld>
     <p:spTree>
       <p:nvGrpSpPr>
@@ -3368,7 +3371,14 @@
         <p:cNvGrpSpPr/>
         <p:nvPr/>
       </p:nvGrpSpPr>
-      <p:grpSpPr/>
+      <p:grpSpPr>
+        <a:xfrm>
+          <a:off x="0" y="0"/>
+          <a:ext cx="0" cy="0"/>
+          <a:chOff x="0" y="0"/>
+          <a:chExt cx="0" cy="0"/>
+        </a:xfrm>
+      </p:grpSpPr>
       <p:sp>
         <p:nvSpPr>
           <p:cNvPr id="2" name="Title 1"/>
@@ -3425,7 +3435,7 @@
 </file>
 
 <file path=ppt/slides/slide3.xml><?xml version="1.0" encoding="utf-8"?>
-<p:sld xmlns:a="http://schemas.openxmlformats.org/drawingml/2006/main" xmlns:p="http://schemas.openxmlformats.org/presentationml/2006/main" xmlns:r="http://schemas.openxmlformats.org/officeDocument/2006/relationships">
+<p:sld xmlns:a="http://schemas.openxmlformats.org/drawingml/2006/main" xmlns:r="http://schemas.openxmlformats.org/officeDocument/2006/relationships" xmlns:p="http://schemas.openxmlformats.org/presentationml/2006/main">
   <p:cSld>
     <p:spTree>
       <p:nvGrpSpPr>
@@ -3433,7 +3443,14 @@
         <p:cNvGrpSpPr/>
         <p:nvPr/>
       </p:nvGrpSpPr>
-      <p:grpSpPr/>
+      <p:grpSpPr>
+        <a:xfrm>
+          <a:off x="0" y="0"/>
+          <a:ext cx="0" cy="0"/>
+          <a:chOff x="0" y="0"/>
+          <a:chExt cx="0" cy="0"/>
+        </a:xfrm>
+      </p:grpSpPr>
       <p:sp>
         <p:nvSpPr>
           <p:cNvPr id="2" name="Title 1"/>
@@ -3471,18 +3488,36 @@
           <a:lstStyle/>
           <a:p>
             <a:r>
+              <a:rPr dirty="0"/>
               <a:t>Mental health monitoring</a:t>
             </a:r>
-          </a:p>
-          <a:p>
-            <a:r>
+            <a:r>
+              <a:rPr lang="en-IN" dirty="0"/>
+              <a:t>.</a:t>
+            </a:r>
+            <a:endParaRPr dirty="0"/>
+          </a:p>
+          <a:p>
+            <a:r>
+              <a:rPr dirty="0"/>
               <a:t>Social media safety</a:t>
             </a:r>
-          </a:p>
-          <a:p>
-            <a:r>
+            <a:r>
+              <a:rPr lang="en-IN" dirty="0"/>
+              <a:t>.</a:t>
+            </a:r>
+            <a:endParaRPr dirty="0"/>
+          </a:p>
+          <a:p>
+            <a:r>
+              <a:rPr dirty="0"/>
               <a:t>Early intervention systems</a:t>
             </a:r>
+            <a:r>
+              <a:rPr lang="en-IN" dirty="0"/>
+              <a:t>.</a:t>
+            </a:r>
+            <a:endParaRPr dirty="0"/>
           </a:p>
         </p:txBody>
       </p:sp>
@@ -3495,7 +3530,7 @@
 </file>
 
 <file path=ppt/slides/slide4.xml><?xml version="1.0" encoding="utf-8"?>
-<p:sld xmlns:a="http://schemas.openxmlformats.org/drawingml/2006/main" xmlns:p="http://schemas.openxmlformats.org/presentationml/2006/main" xmlns:r="http://schemas.openxmlformats.org/officeDocument/2006/relationships">
+<p:sld xmlns:a="http://schemas.openxmlformats.org/drawingml/2006/main" xmlns:r="http://schemas.openxmlformats.org/officeDocument/2006/relationships" xmlns:p="http://schemas.openxmlformats.org/presentationml/2006/main">
   <p:cSld>
     <p:spTree>
       <p:nvGrpSpPr>
@@ -3503,7 +3538,14 @@
         <p:cNvGrpSpPr/>
         <p:nvPr/>
       </p:nvGrpSpPr>
-      <p:grpSpPr/>
+      <p:grpSpPr>
+        <a:xfrm>
+          <a:off x="0" y="0"/>
+          <a:ext cx="0" cy="0"/>
+          <a:chOff x="0" y="0"/>
+          <a:chExt cx="0" cy="0"/>
+        </a:xfrm>
+      </p:grpSpPr>
       <p:sp>
         <p:nvSpPr>
           <p:cNvPr id="2" name="Title 1"/>
@@ -3541,18 +3583,50 @@
           <a:lstStyle/>
           <a:p>
             <a:r>
+              <a:rPr dirty="0"/>
               <a:t>Source: Reddit</a:t>
             </a:r>
-          </a:p>
-          <a:p>
-            <a:r>
+            <a:r>
+              <a:rPr lang="en-IN" dirty="0"/>
+              <a:t>.</a:t>
+            </a:r>
+            <a:endParaRPr dirty="0"/>
+          </a:p>
+          <a:p>
+            <a:r>
+              <a:rPr dirty="0"/>
               <a:t>Columns: text, class</a:t>
             </a:r>
-          </a:p>
-          <a:p>
-            <a:r>
+            <a:r>
+              <a:rPr lang="en-IN" dirty="0"/>
+              <a:t>.</a:t>
+            </a:r>
+            <a:endParaRPr dirty="0"/>
+          </a:p>
+          <a:p>
+            <a:r>
+              <a:rPr dirty="0"/>
               <a:t>Contains labeled posts</a:t>
             </a:r>
+            <a:r>
+              <a:rPr lang="en-IN" dirty="0"/>
+              <a:t>.</a:t>
+            </a:r>
+          </a:p>
+          <a:p>
+            <a:r>
+              <a:rPr lang="en-IN" dirty="0"/>
+              <a:t>Created </a:t>
+            </a:r>
+            <a:r>
+              <a:rPr lang="en-IN" dirty="0" err="1"/>
+              <a:t>clean_text</a:t>
+            </a:r>
+            <a:r>
+              <a:rPr lang="en-IN" dirty="0"/>
+              <a:t> and labels columns from dataset.</a:t>
+            </a:r>
+            <a:endParaRPr dirty="0"/>
           </a:p>
         </p:txBody>
       </p:sp>
@@ -3565,7 +3639,7 @@
 </file>
 
 <file path=ppt/slides/slide5.xml><?xml version="1.0" encoding="utf-8"?>
-<p:sld xmlns:a="http://schemas.openxmlformats.org/drawingml/2006/main" xmlns:p="http://schemas.openxmlformats.org/presentationml/2006/main" xmlns:r="http://schemas.openxmlformats.org/officeDocument/2006/relationships">
+<p:sld xmlns:a="http://schemas.openxmlformats.org/drawingml/2006/main" xmlns:r="http://schemas.openxmlformats.org/officeDocument/2006/relationships" xmlns:p="http://schemas.openxmlformats.org/presentationml/2006/main">
   <p:cSld>
     <p:spTree>
       <p:nvGrpSpPr>
@@ -3573,7 +3647,14 @@
         <p:cNvGrpSpPr/>
         <p:nvPr/>
       </p:nvGrpSpPr>
-      <p:grpSpPr/>
+      <p:grpSpPr>
+        <a:xfrm>
+          <a:off x="0" y="0"/>
+          <a:ext cx="0" cy="0"/>
+          <a:chOff x="0" y="0"/>
+          <a:chExt cx="0" cy="0"/>
+        </a:xfrm>
+      </p:grpSpPr>
       <p:sp>
         <p:nvSpPr>
           <p:cNvPr id="2" name="Title 1"/>
@@ -3640,7 +3721,7 @@
 </file>
 
 <file path=ppt/slides/slide6.xml><?xml version="1.0" encoding="utf-8"?>
-<p:sld xmlns:a="http://schemas.openxmlformats.org/drawingml/2006/main" xmlns:p="http://schemas.openxmlformats.org/presentationml/2006/main" xmlns:r="http://schemas.openxmlformats.org/officeDocument/2006/relationships">
+<p:sld xmlns:a="http://schemas.openxmlformats.org/drawingml/2006/main" xmlns:r="http://schemas.openxmlformats.org/officeDocument/2006/relationships" xmlns:p="http://schemas.openxmlformats.org/presentationml/2006/main">
   <p:cSld>
     <p:spTree>
       <p:nvGrpSpPr>
@@ -3648,7 +3729,14 @@
         <p:cNvGrpSpPr/>
         <p:nvPr/>
       </p:nvGrpSpPr>
-      <p:grpSpPr/>
+      <p:grpSpPr>
+        <a:xfrm>
+          <a:off x="0" y="0"/>
+          <a:ext cx="0" cy="0"/>
+          <a:chOff x="0" y="0"/>
+          <a:chExt cx="0" cy="0"/>
+        </a:xfrm>
+      </p:grpSpPr>
       <p:sp>
         <p:nvSpPr>
           <p:cNvPr id="2" name="Title 1"/>
@@ -3686,18 +3774,84 @@
           <a:lstStyle/>
           <a:p>
             <a:r>
-              <a:t>ML: Logistic Regression, Naive Bayes</a:t>
-            </a:r>
-          </a:p>
-          <a:p>
-            <a:r>
-              <a:t>DL: LSTM, BiLSTM, CNN</a:t>
-            </a:r>
-          </a:p>
-          <a:p>
-            <a:r>
+              <a:rPr dirty="0"/>
+              <a:t>M</a:t>
+            </a:r>
+            <a:r>
+              <a:rPr lang="en-IN" dirty="0" err="1"/>
+              <a:t>achine</a:t>
+            </a:r>
+            <a:r>
+              <a:rPr lang="en-IN" dirty="0"/>
+              <a:t> </a:t>
+            </a:r>
+            <a:r>
+              <a:rPr dirty="0"/>
+              <a:t>L</a:t>
+            </a:r>
+            <a:r>
+              <a:rPr lang="en-IN" dirty="0"/>
+              <a:t>earning</a:t>
+            </a:r>
+            <a:r>
+              <a:rPr dirty="0"/>
+              <a:t>: Logistic Regression, Naive Bayes</a:t>
+            </a:r>
+            <a:r>
+              <a:rPr lang="en-IN" dirty="0"/>
+              <a:t>, SVM</a:t>
+            </a:r>
+            <a:endParaRPr dirty="0"/>
+          </a:p>
+          <a:p>
+            <a:r>
+              <a:rPr dirty="0"/>
+              <a:t>D</a:t>
+            </a:r>
+            <a:r>
+              <a:rPr lang="en-IN" dirty="0" err="1"/>
+              <a:t>eep</a:t>
+            </a:r>
+            <a:r>
+              <a:rPr lang="en-IN" dirty="0"/>
+              <a:t> </a:t>
+            </a:r>
+            <a:r>
+              <a:rPr dirty="0"/>
+              <a:t>L</a:t>
+            </a:r>
+            <a:r>
+              <a:rPr lang="en-IN" dirty="0"/>
+              <a:t>earning</a:t>
+            </a:r>
+            <a:r>
+              <a:rPr dirty="0"/>
+              <a:t>: LSTM, </a:t>
+            </a:r>
+            <a:r>
+              <a:rPr dirty="0" err="1"/>
+              <a:t>BiLSTM</a:t>
+            </a:r>
+            <a:r>
+              <a:rPr dirty="0"/>
+              <a:t>, CNN</a:t>
+            </a:r>
+            <a:r>
+              <a:rPr lang="en-IN" dirty="0"/>
+              <a:t>.</a:t>
+            </a:r>
+            <a:endParaRPr dirty="0"/>
+          </a:p>
+          <a:p>
+            <a:r>
+              <a:rPr dirty="0"/>
               <a:t>Transformer: BERT</a:t>
             </a:r>
+            <a:r>
+              <a:rPr lang="en-IN" dirty="0"/>
+              <a:t>.</a:t>
+            </a:r>
+            <a:endParaRPr dirty="0"/>
           </a:p>
         </p:txBody>
       </p:sp>
@@ -3710,7 +3864,7 @@
 </file>
 
 <file path=ppt/slides/slide7.xml><?xml version="1.0" encoding="utf-8"?>
-<p:sld xmlns:a="http://schemas.openxmlformats.org/drawingml/2006/main" xmlns:p="http://schemas.openxmlformats.org/presentationml/2006/main" xmlns:r="http://schemas.openxmlformats.org/officeDocument/2006/relationships">
+<p:sld xmlns:a="http://schemas.openxmlformats.org/drawingml/2006/main" xmlns:r="http://schemas.openxmlformats.org/officeDocument/2006/relationships" xmlns:p="http://schemas.openxmlformats.org/presentationml/2006/main">
   <p:cSld>
     <p:spTree>
       <p:nvGrpSpPr>
@@ -3718,7 +3872,14 @@
         <p:cNvGrpSpPr/>
         <p:nvPr/>
       </p:nvGrpSpPr>
-      <p:grpSpPr/>
+      <p:grpSpPr>
+        <a:xfrm>
+          <a:off x="0" y="0"/>
+          <a:ext cx="0" cy="0"/>
+          <a:chOff x="0" y="0"/>
+          <a:chExt cx="0" cy="0"/>
+        </a:xfrm>
+      </p:grpSpPr>
       <p:sp>
         <p:nvSpPr>
           <p:cNvPr id="2" name="Title 1"/>
@@ -3756,8 +3917,14 @@
           <a:lstStyle/>
           <a:p>
             <a:r>
+              <a:rPr dirty="0"/>
               <a:t>Input → Tokenization → Embedding → Model → Output</a:t>
             </a:r>
+            <a:r>
+              <a:rPr lang="en-IN" dirty="0"/>
+              <a:t>.</a:t>
+            </a:r>
+            <a:endParaRPr dirty="0"/>
           </a:p>
         </p:txBody>
       </p:sp>
@@ -3770,7 +3937,7 @@
 </file>
 
 <file path=ppt/slides/slide8.xml><?xml version="1.0" encoding="utf-8"?>
-<p:sld xmlns:a="http://schemas.openxmlformats.org/drawingml/2006/main" xmlns:p="http://schemas.openxmlformats.org/presentationml/2006/main" xmlns:r="http://schemas.openxmlformats.org/officeDocument/2006/relationships">
+<p:sld xmlns:a="http://schemas.openxmlformats.org/drawingml/2006/main" xmlns:r="http://schemas.openxmlformats.org/officeDocument/2006/relationships" xmlns:p="http://schemas.openxmlformats.org/presentationml/2006/main">
   <p:cSld>
     <p:spTree>
       <p:nvGrpSpPr>
@@ -3778,7 +3945,14 @@
         <p:cNvGrpSpPr/>
         <p:nvPr/>
       </p:nvGrpSpPr>
-      <p:grpSpPr/>
+      <p:grpSpPr>
+        <a:xfrm>
+          <a:off x="0" y="0"/>
+          <a:ext cx="0" cy="0"/>
+          <a:chOff x="0" y="0"/>
+          <a:chExt cx="0" cy="0"/>
+        </a:xfrm>
+      </p:grpSpPr>
       <p:sp>
         <p:nvSpPr>
           <p:cNvPr id="2" name="Title 1"/>
@@ -3850,7 +4024,7 @@
 </file>
 
 <file path=ppt/slides/slide9.xml><?xml version="1.0" encoding="utf-8"?>
-<p:sld xmlns:a="http://schemas.openxmlformats.org/drawingml/2006/main" xmlns:p="http://schemas.openxmlformats.org/presentationml/2006/main" xmlns:r="http://schemas.openxmlformats.org/officeDocument/2006/relationships">
+<p:sld xmlns:a="http://schemas.openxmlformats.org/drawingml/2006/main" xmlns:r="http://schemas.openxmlformats.org/officeDocument/2006/relationships" xmlns:p="http://schemas.openxmlformats.org/presentationml/2006/main">
   <p:cSld>
     <p:spTree>
       <p:nvGrpSpPr>
@@ -3858,7 +4032,14 @@
         <p:cNvGrpSpPr/>
         <p:nvPr/>
       </p:nvGrpSpPr>
-      <p:grpSpPr/>
+      <p:grpSpPr>
+        <a:xfrm>
+          <a:off x="0" y="0"/>
+          <a:ext cx="0" cy="0"/>
+          <a:chOff x="0" y="0"/>
+          <a:chExt cx="0" cy="0"/>
+        </a:xfrm>
+      </p:grpSpPr>
       <p:sp>
         <p:nvSpPr>
           <p:cNvPr id="2" name="Title 1"/>
@@ -3896,18 +4077,76 @@
           <a:lstStyle/>
           <a:p>
             <a:r>
-              <a:t>BERT performed best</a:t>
-            </a:r>
-          </a:p>
-          <a:p>
-            <a:r>
-              <a:t>DL better than ML</a:t>
-            </a:r>
-          </a:p>
-          <a:p>
-            <a:r>
+              <a:rPr dirty="0"/>
+              <a:t>BERT </a:t>
+            </a:r>
+            <a:r>
+              <a:rPr lang="en-IN" dirty="0"/>
+              <a:t>transformer </a:t>
+            </a:r>
+            <a:r>
+              <a:rPr dirty="0"/>
+              <a:t>performed best</a:t>
+            </a:r>
+            <a:r>
+              <a:rPr lang="en-IN" dirty="0"/>
+              <a:t>.</a:t>
+            </a:r>
+            <a:endParaRPr dirty="0"/>
+          </a:p>
+          <a:p>
+            <a:r>
+              <a:rPr dirty="0"/>
+              <a:t>D</a:t>
+            </a:r>
+            <a:r>
+              <a:rPr lang="en-IN" dirty="0" err="1"/>
+              <a:t>eep</a:t>
+            </a:r>
+            <a:r>
+              <a:rPr lang="en-IN" dirty="0"/>
+              <a:t> </a:t>
+            </a:r>
+            <a:r>
+              <a:rPr dirty="0"/>
+              <a:t>L</a:t>
+            </a:r>
+            <a:r>
+              <a:rPr lang="en-IN" dirty="0"/>
+              <a:t>earning performed</a:t>
+            </a:r>
+            <a:r>
+              <a:rPr dirty="0"/>
+              <a:t> better than M</a:t>
+            </a:r>
+            <a:r>
+              <a:rPr lang="en-IN" dirty="0" err="1"/>
+              <a:t>achine</a:t>
+            </a:r>
+            <a:r>
+              <a:rPr lang="en-IN" dirty="0"/>
+              <a:t> </a:t>
+            </a:r>
+            <a:r>
+              <a:rPr dirty="0"/>
+              <a:t>L</a:t>
+            </a:r>
+            <a:r>
+              <a:rPr lang="en-IN" dirty="0"/>
+              <a:t>earning.</a:t>
+            </a:r>
+            <a:endParaRPr dirty="0"/>
+          </a:p>
+          <a:p>
+            <a:r>
+              <a:rPr dirty="0"/>
               <a:t>Improved accuracy</a:t>
             </a:r>
+            <a:r>
+              <a:rPr lang="en-IN" dirty="0"/>
+              <a:t>.</a:t>
+            </a:r>
+            <a:endParaRPr dirty="0"/>
           </a:p>
         </p:txBody>
       </p:sp>

--- a/Suicide_AI_Project_Presentation.pptx
+++ b/Suicide_AI_Project_Presentation.pptx
@@ -16,6 +16,7 @@
     <p:sldId id="264" r:id="rId10"/>
     <p:sldId id="265" r:id="rId11"/>
     <p:sldId id="266" r:id="rId12"/>
+    <p:sldId id="267" r:id="rId13"/>
   </p:sldIdLst>
   <p:sldSz cx="9144000" cy="6858000" type="screen4x3"/>
   <p:notesSz cx="6858000" cy="9144000"/>
@@ -3112,7 +3113,9 @@
         </p:nvSpPr>
         <p:spPr/>
         <p:txBody>
-          <a:bodyPr/>
+          <a:bodyPr>
+            <a:normAutofit fontScale="90000"/>
+          </a:bodyPr>
           <a:lstStyle/>
           <a:p>
             <a:r>
@@ -3137,42 +3140,29 @@
           <a:lstStyle/>
           <a:p>
             <a:r>
+              <a:rPr lang="en-IN" dirty="0"/>
+              <a:t>Name: </a:t>
+            </a:r>
+            <a:r>
+              <a:rPr dirty="0" err="1"/>
+              <a:t>Keerthick</a:t>
+            </a:r>
+            <a:r>
               <a:rPr dirty="0"/>
-              <a:t>Name:</a:t>
-            </a:r>
-            <a:r>
-              <a:rPr lang="en-IN" dirty="0"/>
-              <a:t> </a:t>
-            </a:r>
-            <a:r>
-              <a:rPr lang="en-IN" dirty="0" err="1"/>
-              <a:t>Keerthick</a:t>
-            </a:r>
-            <a:r>
-              <a:rPr lang="en-IN" dirty="0"/>
               <a:t> J</a:t>
             </a:r>
+          </a:p>
+          <a:p>
             <a:r>
               <a:rPr dirty="0"/>
-              <a:t> </a:t>
+              <a:t>AIML Project</a:t>
             </a:r>
           </a:p>
           <a:p>
             <a:r>
               <a:rPr dirty="0"/>
-              <a:t>Course: AIML</a:t>
-            </a:r>
-          </a:p>
-          <a:p>
-            <a:r>
-              <a:rPr dirty="0"/>
-              <a:t>Date:</a:t>
-            </a:r>
-            <a:r>
-              <a:rPr lang="en-IN" dirty="0"/>
-              <a:t> 07-03-2026</a:t>
-            </a:r>
-            <a:endParaRPr dirty="0"/>
+              <a:t>ML | DL | Transformers</a:t>
+            </a:r>
           </a:p>
         </p:txBody>
       </p:sp>
@@ -3217,7 +3207,7 @@
           <a:lstStyle/>
           <a:p>
             <a:r>
-              <a:t>Explainable AI</a:t>
+              <a:t>Key Insights</a:t>
             </a:r>
           </a:p>
         </p:txBody>
@@ -3239,18 +3229,41 @@
           <a:p>
             <a:r>
               <a:rPr dirty="0"/>
-              <a:t>Used LIME</a:t>
+              <a:t>Transformer (BERT) achieved highest performance</a:t>
             </a:r>
             <a:r>
               <a:rPr lang="en-IN" dirty="0"/>
               <a:t>.</a:t>
             </a:r>
-          </a:p>
-          <a:p>
+            <a:endParaRPr dirty="0"/>
+          </a:p>
+          <a:p>
+            <a:r>
+              <a:rPr dirty="0"/>
+              <a:t>Deep learning models performed consistently</a:t>
+            </a:r>
+          </a:p>
+          <a:p>
+            <a:r>
+              <a:rPr dirty="0"/>
+              <a:t>ML models still competitive</a:t>
+            </a:r>
             <a:r>
               <a:rPr lang="en-IN" dirty="0"/>
-              <a:t>Highlighted important words.</a:t>
-            </a:r>
+              <a:t>.</a:t>
+            </a:r>
+            <a:endParaRPr dirty="0"/>
+          </a:p>
+          <a:p>
+            <a:r>
+              <a:rPr dirty="0"/>
+              <a:t>Context understanding improves accuracy</a:t>
+            </a:r>
+            <a:r>
+              <a:rPr lang="en-IN" dirty="0"/>
+              <a:t>.</a:t>
+            </a:r>
+            <a:endParaRPr dirty="0"/>
           </a:p>
         </p:txBody>
       </p:sp>
@@ -3295,7 +3308,7 @@
           <a:lstStyle/>
           <a:p>
             <a:r>
-              <a:t>Conclusion</a:t>
+              <a:t>Explainable AI</a:t>
             </a:r>
           </a:p>
         </p:txBody>
@@ -3317,7 +3330,7 @@
           <a:p>
             <a:r>
               <a:rPr dirty="0"/>
-              <a:t>AI helps detect suicidal intent</a:t>
+              <a:t>Used LIME</a:t>
             </a:r>
             <a:r>
               <a:rPr lang="en-IN" dirty="0"/>
@@ -3328,27 +3341,117 @@
           <a:p>
             <a:r>
               <a:rPr dirty="0"/>
-              <a:t>Transformer</a:t>
+              <a:t>Highlighted key words influencing prediction</a:t>
             </a:r>
             <a:r>
               <a:rPr lang="en-IN" dirty="0"/>
-              <a:t> BERT</a:t>
-            </a:r>
+              <a:t>.</a:t>
+            </a:r>
+            <a:endParaRPr dirty="0"/>
+          </a:p>
+          <a:p>
             <a:r>
               <a:rPr dirty="0"/>
-              <a:t> perform</a:t>
+              <a:t>Improves model transparency</a:t>
             </a:r>
             <a:r>
               <a:rPr lang="en-IN" dirty="0"/>
-              <a:t>d</a:t>
-            </a:r>
+              <a:t>.</a:t>
+            </a:r>
+            <a:endParaRPr dirty="0"/>
+          </a:p>
+        </p:txBody>
+      </p:sp>
+    </p:spTree>
+  </p:cSld>
+  <p:clrMapOvr>
+    <a:masterClrMapping/>
+  </p:clrMapOvr>
+</p:sld>
+</file>
+
+<file path=ppt/slides/slide12.xml><?xml version="1.0" encoding="utf-8"?>
+<p:sld xmlns:a="http://schemas.openxmlformats.org/drawingml/2006/main" xmlns:r="http://schemas.openxmlformats.org/officeDocument/2006/relationships" xmlns:p="http://schemas.openxmlformats.org/presentationml/2006/main">
+  <p:cSld>
+    <p:spTree>
+      <p:nvGrpSpPr>
+        <p:cNvPr id="1" name=""/>
+        <p:cNvGrpSpPr/>
+        <p:nvPr/>
+      </p:nvGrpSpPr>
+      <p:grpSpPr>
+        <a:xfrm>
+          <a:off x="0" y="0"/>
+          <a:ext cx="0" cy="0"/>
+          <a:chOff x="0" y="0"/>
+          <a:chExt cx="0" cy="0"/>
+        </a:xfrm>
+      </p:grpSpPr>
+      <p:sp>
+        <p:nvSpPr>
+          <p:cNvPr id="2" name="Title 1"/>
+          <p:cNvSpPr>
+            <a:spLocks noGrp="1"/>
+          </p:cNvSpPr>
+          <p:nvPr>
+            <p:ph type="title"/>
+          </p:nvPr>
+        </p:nvSpPr>
+        <p:spPr/>
+        <p:txBody>
+          <a:bodyPr/>
+          <a:lstStyle/>
+          <a:p>
+            <a:r>
+              <a:t>Conclusion</a:t>
+            </a:r>
+          </a:p>
+        </p:txBody>
+      </p:sp>
+      <p:sp>
+        <p:nvSpPr>
+          <p:cNvPr id="3" name="Content Placeholder 2"/>
+          <p:cNvSpPr>
+            <a:spLocks noGrp="1"/>
+          </p:cNvSpPr>
+          <p:nvPr>
+            <p:ph idx="1"/>
+          </p:nvPr>
+        </p:nvSpPr>
+        <p:spPr/>
+        <p:txBody>
+          <a:bodyPr/>
+          <a:lstStyle/>
+          <a:p>
             <a:r>
               <a:rPr dirty="0"/>
-              <a:t> best</a:t>
+              <a:t>BERT outperforms all models</a:t>
             </a:r>
             <a:r>
               <a:rPr lang="en-IN" dirty="0"/>
-              <a:t> compared to others with the accuracy of 96%.</a:t>
+              <a:t>.</a:t>
+            </a:r>
+            <a:endParaRPr dirty="0"/>
+          </a:p>
+          <a:p>
+            <a:r>
+              <a:rPr dirty="0"/>
+              <a:t>AI can assist in mental health detection</a:t>
+            </a:r>
+            <a:r>
+              <a:rPr lang="en-IN" dirty="0"/>
+              <a:t>.</a:t>
+            </a:r>
+            <a:endParaRPr dirty="0"/>
+          </a:p>
+          <a:p>
+            <a:r>
+              <a:rPr dirty="0"/>
+              <a:t>Useful for real-world deployment</a:t>
+            </a:r>
+            <a:r>
+              <a:rPr lang="en-IN" dirty="0"/>
+              <a:t>.</a:t>
             </a:r>
             <a:endParaRPr dirty="0"/>
           </a:p>
@@ -3416,11 +3519,20 @@
           <a:lstStyle/>
           <a:p>
             <a:r>
-              <a:t>Detect suicidal thoughts from social media text using AI.</a:t>
-            </a:r>
-          </a:p>
-          <a:p>
-            <a:r>
+              <a:rPr dirty="0"/>
+              <a:t>Detect suicidal intent from social media text.</a:t>
+            </a:r>
+          </a:p>
+          <a:p>
+            <a:r>
+              <a:rPr dirty="0"/>
+              <a:t>Enable early intervention using AI models.</a:t>
+            </a:r>
+            <a:endParaRPr lang="en-IN" dirty="0"/>
+          </a:p>
+          <a:p>
+            <a:r>
+              <a:rPr lang="en-IN" dirty="0"/>
               <a:t>Classify risk levels automatically.</a:t>
             </a:r>
           </a:p>
@@ -3511,7 +3623,18 @@
           <a:p>
             <a:r>
               <a:rPr dirty="0"/>
-              <a:t>Early intervention systems</a:t>
+              <a:t>Early intervention</a:t>
+            </a:r>
+            <a:r>
+              <a:rPr lang="en-IN" dirty="0"/>
+              <a:t>.</a:t>
+            </a:r>
+            <a:endParaRPr dirty="0"/>
+          </a:p>
+          <a:p>
+            <a:r>
+              <a:rPr dirty="0"/>
+              <a:t>Healthcare analytics</a:t>
             </a:r>
             <a:r>
               <a:rPr lang="en-IN" dirty="0"/>
@@ -3606,7 +3729,7 @@
           <a:p>
             <a:r>
               <a:rPr dirty="0"/>
-              <a:t>Contains labeled posts</a:t>
+              <a:t>Binary classification problem</a:t>
             </a:r>
             <a:r>
               <a:rPr lang="en-IN" dirty="0"/>
@@ -3615,18 +3738,17 @@
           </a:p>
           <a:p>
             <a:r>
-              <a:rPr lang="en-IN" dirty="0"/>
+              <a:rPr lang="en-US" dirty="0"/>
               <a:t>Created </a:t>
             </a:r>
             <a:r>
-              <a:rPr lang="en-IN" dirty="0" err="1"/>
+              <a:rPr lang="en-US" dirty="0" err="1"/>
               <a:t>clean_text</a:t>
             </a:r>
             <a:r>
-              <a:rPr lang="en-IN" dirty="0"/>
+              <a:rPr lang="en-US" dirty="0"/>
               <a:t> and labels columns from dataset.</a:t>
             </a:r>
-            <a:endParaRPr dirty="0"/>
           </a:p>
         </p:txBody>
       </p:sp>
@@ -3710,6 +3832,11 @@
               <a:t>Lowercasing</a:t>
             </a:r>
           </a:p>
+          <a:p>
+            <a:r>
+              <a:t>Vectorization (TF-IDF / Embeddings)</a:t>
+            </a:r>
+          </a:p>
         </p:txBody>
       </p:sp>
     </p:spTree>
@@ -3775,58 +3902,18 @@
           <a:p>
             <a:r>
               <a:rPr dirty="0"/>
-              <a:t>M</a:t>
-            </a:r>
-            <a:r>
-              <a:rPr lang="en-IN" dirty="0" err="1"/>
-              <a:t>achine</a:t>
+              <a:t>Machine Learning: Logistic Regression, Naive Bayes, SVM</a:t>
             </a:r>
             <a:r>
               <a:rPr lang="en-IN" dirty="0"/>
-              <a:t> </a:t>
-            </a:r>
+              <a:t>.</a:t>
+            </a:r>
+            <a:endParaRPr dirty="0"/>
+          </a:p>
+          <a:p>
             <a:r>
               <a:rPr dirty="0"/>
-              <a:t>L</a:t>
-            </a:r>
-            <a:r>
-              <a:rPr lang="en-IN" dirty="0"/>
-              <a:t>earning</a:t>
-            </a:r>
-            <a:r>
-              <a:rPr dirty="0"/>
-              <a:t>: Logistic Regression, Naive Bayes</a:t>
-            </a:r>
-            <a:r>
-              <a:rPr lang="en-IN" dirty="0"/>
-              <a:t>, SVM</a:t>
-            </a:r>
-            <a:endParaRPr dirty="0"/>
-          </a:p>
-          <a:p>
-            <a:r>
-              <a:rPr dirty="0"/>
-              <a:t>D</a:t>
-            </a:r>
-            <a:r>
-              <a:rPr lang="en-IN" dirty="0" err="1"/>
-              <a:t>eep</a:t>
-            </a:r>
-            <a:r>
-              <a:rPr lang="en-IN" dirty="0"/>
-              <a:t> </a:t>
-            </a:r>
-            <a:r>
-              <a:rPr dirty="0"/>
-              <a:t>L</a:t>
-            </a:r>
-            <a:r>
-              <a:rPr lang="en-IN" dirty="0"/>
-              <a:t>earning</a:t>
-            </a:r>
-            <a:r>
-              <a:rPr dirty="0"/>
-              <a:t>: LSTM, </a:t>
+              <a:t>Deep Learning: LSTM, </a:t>
             </a:r>
             <a:r>
               <a:rPr dirty="0" err="1"/>
@@ -3896,7 +3983,7 @@
           <a:lstStyle/>
           <a:p>
             <a:r>
-              <a:t>Model Architecture</a:t>
+              <a:t>Model Workflow</a:t>
             </a:r>
           </a:p>
         </p:txBody>
@@ -3917,14 +4004,8 @@
           <a:lstStyle/>
           <a:p>
             <a:r>
-              <a:rPr dirty="0"/>
-              <a:t>Input → Tokenization → Embedding → Model → Output</a:t>
-            </a:r>
-            <a:r>
-              <a:rPr lang="en-IN" dirty="0"/>
-              <a:t>.</a:t>
-            </a:r>
-            <a:endParaRPr dirty="0"/>
+              <a:t>Text → Preprocessing → Tokenization → Embedding → Model → Prediction</a:t>
+            </a:r>
           </a:p>
         </p:txBody>
       </p:sp>
@@ -3990,28 +4071,47 @@
           <a:lstStyle/>
           <a:p>
             <a:r>
-              <a:t>Accuracy</a:t>
-            </a:r>
-          </a:p>
-          <a:p>
-            <a:r>
-              <a:t>Precision</a:t>
-            </a:r>
-          </a:p>
-          <a:p>
-            <a:r>
-              <a:t>Recall</a:t>
-            </a:r>
-          </a:p>
-          <a:p>
-            <a:r>
-              <a:t>F1 Score</a:t>
-            </a:r>
-          </a:p>
-          <a:p>
-            <a:r>
-              <a:t>Confusion Matrix</a:t>
-            </a:r>
+              <a:rPr dirty="0"/>
+              <a:t>Accuracy: Overall correctness</a:t>
+            </a:r>
+            <a:r>
+              <a:rPr lang="en-IN" dirty="0"/>
+              <a:t>.</a:t>
+            </a:r>
+            <a:endParaRPr dirty="0"/>
+          </a:p>
+          <a:p>
+            <a:r>
+              <a:rPr dirty="0"/>
+              <a:t>Precision: Correct positive predictions</a:t>
+            </a:r>
+            <a:r>
+              <a:rPr lang="en-IN" dirty="0"/>
+              <a:t>.</a:t>
+            </a:r>
+            <a:endParaRPr dirty="0"/>
+          </a:p>
+          <a:p>
+            <a:r>
+              <a:rPr dirty="0"/>
+              <a:t>Recall: Capturing actual positives</a:t>
+            </a:r>
+            <a:r>
+              <a:rPr lang="en-IN" dirty="0"/>
+              <a:t>.</a:t>
+            </a:r>
+            <a:endParaRPr dirty="0"/>
+          </a:p>
+          <a:p>
+            <a:r>
+              <a:rPr dirty="0"/>
+              <a:t>F1 Score: Balance of precision &amp; recall</a:t>
+            </a:r>
+            <a:r>
+              <a:rPr lang="en-IN" dirty="0"/>
+              <a:t>.</a:t>
+            </a:r>
+            <a:endParaRPr dirty="0"/>
           </a:p>
         </p:txBody>
       </p:sp>
@@ -4056,7 +4156,7 @@
           <a:lstStyle/>
           <a:p>
             <a:r>
-              <a:t>Results</a:t>
+              <a:t>Model Performance Comparison</a:t>
             </a:r>
           </a:p>
         </p:txBody>
@@ -4073,80 +4173,52 @@
         </p:nvSpPr>
         <p:spPr/>
         <p:txBody>
-          <a:bodyPr/>
-          <a:lstStyle/>
-          <a:p>
-            <a:r>
-              <a:rPr dirty="0"/>
-              <a:t>BERT </a:t>
-            </a:r>
-            <a:r>
-              <a:rPr lang="en-IN" dirty="0"/>
-              <a:t>transformer </a:t>
-            </a:r>
-            <a:r>
-              <a:rPr dirty="0"/>
-              <a:t>performed best</a:t>
-            </a:r>
-            <a:r>
-              <a:rPr lang="en-IN" dirty="0"/>
-              <a:t>.</a:t>
-            </a:r>
-            <a:endParaRPr dirty="0"/>
-          </a:p>
-          <a:p>
-            <a:r>
-              <a:rPr dirty="0"/>
-              <a:t>D</a:t>
-            </a:r>
-            <a:r>
-              <a:rPr lang="en-IN" dirty="0" err="1"/>
-              <a:t>eep</a:t>
-            </a:r>
-            <a:r>
-              <a:rPr lang="en-IN" dirty="0"/>
-              <a:t> </a:t>
-            </a:r>
-            <a:r>
-              <a:rPr dirty="0"/>
-              <a:t>L</a:t>
-            </a:r>
-            <a:r>
-              <a:rPr lang="en-IN" dirty="0"/>
-              <a:t>earning performed</a:t>
-            </a:r>
-            <a:r>
-              <a:rPr dirty="0"/>
-              <a:t> better than M</a:t>
-            </a:r>
-            <a:r>
-              <a:rPr lang="en-IN" dirty="0" err="1"/>
-              <a:t>achine</a:t>
-            </a:r>
-            <a:r>
-              <a:rPr lang="en-IN" dirty="0"/>
-              <a:t> </a:t>
-            </a:r>
-            <a:r>
-              <a:rPr dirty="0"/>
-              <a:t>L</a:t>
-            </a:r>
-            <a:r>
-              <a:rPr lang="en-IN" dirty="0"/>
-              <a:t>earning.</a:t>
-            </a:r>
-            <a:endParaRPr dirty="0"/>
-          </a:p>
-          <a:p>
-            <a:r>
-              <a:rPr dirty="0"/>
-              <a:t>Improved accuracy</a:t>
-            </a:r>
-            <a:r>
-              <a:rPr lang="en-IN" dirty="0"/>
-              <a:t>.</a:t>
-            </a:r>
-            <a:endParaRPr dirty="0"/>
+          <a:bodyPr>
+            <a:normAutofit fontScale="92500" lnSpcReduction="20000"/>
+          </a:bodyPr>
+          <a:lstStyle/>
+          <a:p>
+            <a:r>
+              <a:t>Logistic Regression - 0.94</a:t>
+            </a:r>
+          </a:p>
+          <a:p>
+            <a:r>
+              <a:t>Naive Bayes - 0.91</a:t>
+            </a:r>
+          </a:p>
+          <a:p>
+            <a:r>
+              <a:t>SVM - 0.94</a:t>
+            </a:r>
+          </a:p>
+          <a:p>
+            <a:r>
+              <a:t>LSTM - 0.93</a:t>
+            </a:r>
+          </a:p>
+          <a:p>
+            <a:r>
+              <a:t>BiLSTM - 0.93</a:t>
+            </a:r>
+          </a:p>
+          <a:p>
+            <a:r>
+              <a:t>CNN - 0.93</a:t>
+            </a:r>
+          </a:p>
+          <a:p>
+            <a:r>
+              <a:t>BERT - 0.96</a:t>
+            </a:r>
+          </a:p>
+          <a:p>
+            <a:endParaRPr/>
+          </a:p>
+          <a:p>
+            <a:r>
+              <a:t>Best Model: BERT</a:t>
+            </a:r>
           </a:p>
         </p:txBody>
       </p:sp>
